--- a/docs/guide/十八音輸入方案變調操作.pptx
+++ b/docs/guide/十八音輸入方案變調操作.pptx
@@ -11,8 +11,8 @@
     <p:sldId id="306" r:id="rId2"/>
     <p:sldId id="369" r:id="rId3"/>
     <p:sldId id="358" r:id="rId4"/>
-    <p:sldId id="357" r:id="rId5"/>
-    <p:sldId id="360" r:id="rId6"/>
+    <p:sldId id="359" r:id="rId5"/>
+    <p:sldId id="357" r:id="rId6"/>
     <p:sldId id="390" r:id="rId7"/>
     <p:sldId id="388" r:id="rId8"/>
     <p:sldId id="392" r:id="rId9"/>
@@ -27,7 +27,7 @@
     <p:sldId id="372" r:id="rId18"/>
     <p:sldId id="386" r:id="rId19"/>
     <p:sldId id="391" r:id="rId20"/>
-    <p:sldId id="359" r:id="rId21"/>
+    <p:sldId id="360" r:id="rId21"/>
     <p:sldId id="366" r:id="rId22"/>
     <p:sldId id="393" r:id="rId23"/>
     <p:sldId id="374" r:id="rId24"/>
@@ -734,7 +734,7 @@
         <p:cNvPr id="1" name="">
           <a:extLst>
             <a:ext uri="{FF2B5EF4-FFF2-40B4-BE49-F238E27FC236}">
-              <a16:creationId xmlns:a16="http://schemas.microsoft.com/office/drawing/2014/main" id="{AB1B4F5E-2645-F827-37AC-3FB455B3E681}"/>
+              <a16:creationId xmlns:a16="http://schemas.microsoft.com/office/drawing/2014/main" id="{FAC9840A-41FA-94F1-CD47-DCF441CCA425}"/>
             </a:ext>
           </a:extLst>
         </p:cNvPr>
@@ -754,7 +754,7 @@
           <p:cNvPr id="2" name="投影片影像版面配置區 1">
             <a:extLst>
               <a:ext uri="{FF2B5EF4-FFF2-40B4-BE49-F238E27FC236}">
-                <a16:creationId xmlns:a16="http://schemas.microsoft.com/office/drawing/2014/main" id="{82425DAA-8FCA-40AA-4337-E64D32726A76}"/>
+                <a16:creationId xmlns:a16="http://schemas.microsoft.com/office/drawing/2014/main" id="{BD260368-4C0A-E853-26ED-C854BE471F49}"/>
               </a:ext>
             </a:extLst>
           </p:cNvPr>
@@ -777,7 +777,7 @@
           <p:cNvPr id="3" name="備忘稿版面配置區 2">
             <a:extLst>
               <a:ext uri="{FF2B5EF4-FFF2-40B4-BE49-F238E27FC236}">
-                <a16:creationId xmlns:a16="http://schemas.microsoft.com/office/drawing/2014/main" id="{BA495CF3-4096-BD69-6C4F-B152A2523C52}"/>
+                <a16:creationId xmlns:a16="http://schemas.microsoft.com/office/drawing/2014/main" id="{F5BDDD1D-045E-601C-2B7D-FBE6865C8A98}"/>
               </a:ext>
             </a:extLst>
           </p:cNvPr>
@@ -805,7 +805,7 @@
           <p:cNvPr id="4" name="投影片編號版面配置區 3">
             <a:extLst>
               <a:ext uri="{FF2B5EF4-FFF2-40B4-BE49-F238E27FC236}">
-                <a16:creationId xmlns:a16="http://schemas.microsoft.com/office/drawing/2014/main" id="{4B723A4C-6AF7-15CB-E4E1-F6D5606F2496}"/>
+                <a16:creationId xmlns:a16="http://schemas.microsoft.com/office/drawing/2014/main" id="{B0A7AC19-968D-4AA6-E505-306772C89207}"/>
               </a:ext>
             </a:extLst>
           </p:cNvPr>
@@ -839,7 +839,7 @@
     </p:spTree>
     <p:extLst>
       <p:ext uri="{BB962C8B-B14F-4D97-AF65-F5344CB8AC3E}">
-        <p14:creationId xmlns:p14="http://schemas.microsoft.com/office/powerpoint/2010/main" val="375632599"/>
+        <p14:creationId xmlns:p14="http://schemas.microsoft.com/office/powerpoint/2010/main" val="1943482580"/>
       </p:ext>
     </p:extLst>
   </p:cSld>
@@ -1472,6 +1472,129 @@
         <p:cNvPr id="1" name="">
           <a:extLst>
             <a:ext uri="{FF2B5EF4-FFF2-40B4-BE49-F238E27FC236}">
+              <a16:creationId xmlns:a16="http://schemas.microsoft.com/office/drawing/2014/main" id="{AB1B4F5E-2645-F827-37AC-3FB455B3E681}"/>
+            </a:ext>
+          </a:extLst>
+        </p:cNvPr>
+        <p:cNvGrpSpPr/>
+        <p:nvPr/>
+      </p:nvGrpSpPr>
+      <p:grpSpPr>
+        <a:xfrm>
+          <a:off x="0" y="0"/>
+          <a:ext cx="0" cy="0"/>
+          <a:chOff x="0" y="0"/>
+          <a:chExt cx="0" cy="0"/>
+        </a:xfrm>
+      </p:grpSpPr>
+      <p:sp>
+        <p:nvSpPr>
+          <p:cNvPr id="2" name="投影片影像版面配置區 1">
+            <a:extLst>
+              <a:ext uri="{FF2B5EF4-FFF2-40B4-BE49-F238E27FC236}">
+                <a16:creationId xmlns:a16="http://schemas.microsoft.com/office/drawing/2014/main" id="{82425DAA-8FCA-40AA-4337-E64D32726A76}"/>
+              </a:ext>
+            </a:extLst>
+          </p:cNvPr>
+          <p:cNvSpPr>
+            <a:spLocks noGrp="1" noRot="1" noChangeAspect="1"/>
+          </p:cNvSpPr>
+          <p:nvPr>
+            <p:ph type="sldImg"/>
+          </p:nvPr>
+        </p:nvSpPr>
+        <p:spPr>
+          <a:xfrm>
+            <a:off x="2560638" y="1143000"/>
+            <a:ext cx="1736725" cy="3086100"/>
+          </a:xfrm>
+        </p:spPr>
+      </p:sp>
+      <p:sp>
+        <p:nvSpPr>
+          <p:cNvPr id="3" name="備忘稿版面配置區 2">
+            <a:extLst>
+              <a:ext uri="{FF2B5EF4-FFF2-40B4-BE49-F238E27FC236}">
+                <a16:creationId xmlns:a16="http://schemas.microsoft.com/office/drawing/2014/main" id="{BA495CF3-4096-BD69-6C4F-B152A2523C52}"/>
+              </a:ext>
+            </a:extLst>
+          </p:cNvPr>
+          <p:cNvSpPr>
+            <a:spLocks noGrp="1"/>
+          </p:cNvSpPr>
+          <p:nvPr>
+            <p:ph type="body" idx="1"/>
+          </p:nvPr>
+        </p:nvSpPr>
+        <p:spPr/>
+        <p:txBody>
+          <a:bodyPr/>
+          <a:lstStyle/>
+          <a:p>
+            <a:endParaRPr lang="zh-TW" altLang="en-US">
+              <a:latin typeface="Microsoft JhengHei UI" panose="020B0604030504040204" pitchFamily="34" charset="-120"/>
+              <a:ea typeface="Microsoft JhengHei UI" panose="020B0604030504040204" pitchFamily="34" charset="-120"/>
+            </a:endParaRPr>
+          </a:p>
+        </p:txBody>
+      </p:sp>
+      <p:sp>
+        <p:nvSpPr>
+          <p:cNvPr id="4" name="投影片編號版面配置區 3">
+            <a:extLst>
+              <a:ext uri="{FF2B5EF4-FFF2-40B4-BE49-F238E27FC236}">
+                <a16:creationId xmlns:a16="http://schemas.microsoft.com/office/drawing/2014/main" id="{4B723A4C-6AF7-15CB-E4E1-F6D5606F2496}"/>
+              </a:ext>
+            </a:extLst>
+          </p:cNvPr>
+          <p:cNvSpPr>
+            <a:spLocks noGrp="1"/>
+          </p:cNvSpPr>
+          <p:nvPr>
+            <p:ph type="sldNum" sz="quarter" idx="5"/>
+          </p:nvPr>
+        </p:nvSpPr>
+        <p:spPr/>
+        <p:txBody>
+          <a:bodyPr/>
+          <a:lstStyle/>
+          <a:p>
+            <a:pPr rtl="0"/>
+            <a:fld id="{D5939589-3E79-4C82-AA4A-FE78234FAA59}" type="slidenum">
+              <a:rPr lang="en-US" altLang="zh-TW" smtClean="0">
+                <a:latin typeface="Microsoft JhengHei UI" panose="020B0604030504040204" pitchFamily="34" charset="-120"/>
+                <a:ea typeface="Microsoft JhengHei UI" panose="020B0604030504040204" pitchFamily="34" charset="-120"/>
+              </a:rPr>
+              <a:t>4</a:t>
+            </a:fld>
+            <a:endParaRPr lang="zh-TW" altLang="en-US">
+              <a:latin typeface="Microsoft JhengHei UI" panose="020B0604030504040204" pitchFamily="34" charset="-120"/>
+              <a:ea typeface="Microsoft JhengHei UI" panose="020B0604030504040204" pitchFamily="34" charset="-120"/>
+            </a:endParaRPr>
+          </a:p>
+        </p:txBody>
+      </p:sp>
+    </p:spTree>
+    <p:extLst>
+      <p:ext uri="{BB962C8B-B14F-4D97-AF65-F5344CB8AC3E}">
+        <p14:creationId xmlns:p14="http://schemas.microsoft.com/office/powerpoint/2010/main" val="375632599"/>
+      </p:ext>
+    </p:extLst>
+  </p:cSld>
+  <p:clrMapOvr>
+    <a:masterClrMapping/>
+  </p:clrMapOvr>
+</p:notes>
+</file>
+
+<file path=ppt/notesSlides/notesSlide4.xml><?xml version="1.0" encoding="utf-8"?>
+<p:notes xmlns:a="http://schemas.openxmlformats.org/drawingml/2006/main" xmlns:r="http://schemas.openxmlformats.org/officeDocument/2006/relationships" xmlns:p="http://schemas.openxmlformats.org/presentationml/2006/main">
+  <p:cSld>
+    <p:spTree>
+      <p:nvGrpSpPr>
+        <p:cNvPr id="1" name="">
+          <a:extLst>
+            <a:ext uri="{FF2B5EF4-FFF2-40B4-BE49-F238E27FC236}">
               <a16:creationId xmlns:a16="http://schemas.microsoft.com/office/drawing/2014/main" id="{C84FAEC5-7EE3-CEC3-55A6-442F8F30154F}"/>
             </a:ext>
           </a:extLst>
@@ -1565,7 +1688,7 @@
                 <a:latin typeface="Microsoft JhengHei UI" panose="020B0604030504040204" pitchFamily="34" charset="-120"/>
                 <a:ea typeface="Microsoft JhengHei UI" panose="020B0604030504040204" pitchFamily="34" charset="-120"/>
               </a:rPr>
-              <a:t>4</a:t>
+              <a:t>5</a:t>
             </a:fld>
             <a:endParaRPr lang="zh-TW" altLang="en-US">
               <a:latin typeface="Microsoft JhengHei UI" panose="020B0604030504040204" pitchFamily="34" charset="-120"/>
@@ -1578,129 +1701,6 @@
     <p:extLst>
       <p:ext uri="{BB962C8B-B14F-4D97-AF65-F5344CB8AC3E}">
         <p14:creationId xmlns:p14="http://schemas.microsoft.com/office/powerpoint/2010/main" val="93190481"/>
-      </p:ext>
-    </p:extLst>
-  </p:cSld>
-  <p:clrMapOvr>
-    <a:masterClrMapping/>
-  </p:clrMapOvr>
-</p:notes>
-</file>
-
-<file path=ppt/notesSlides/notesSlide4.xml><?xml version="1.0" encoding="utf-8"?>
-<p:notes xmlns:a="http://schemas.openxmlformats.org/drawingml/2006/main" xmlns:r="http://schemas.openxmlformats.org/officeDocument/2006/relationships" xmlns:p="http://schemas.openxmlformats.org/presentationml/2006/main">
-  <p:cSld>
-    <p:spTree>
-      <p:nvGrpSpPr>
-        <p:cNvPr id="1" name="">
-          <a:extLst>
-            <a:ext uri="{FF2B5EF4-FFF2-40B4-BE49-F238E27FC236}">
-              <a16:creationId xmlns:a16="http://schemas.microsoft.com/office/drawing/2014/main" id="{FAC9840A-41FA-94F1-CD47-DCF441CCA425}"/>
-            </a:ext>
-          </a:extLst>
-        </p:cNvPr>
-        <p:cNvGrpSpPr/>
-        <p:nvPr/>
-      </p:nvGrpSpPr>
-      <p:grpSpPr>
-        <a:xfrm>
-          <a:off x="0" y="0"/>
-          <a:ext cx="0" cy="0"/>
-          <a:chOff x="0" y="0"/>
-          <a:chExt cx="0" cy="0"/>
-        </a:xfrm>
-      </p:grpSpPr>
-      <p:sp>
-        <p:nvSpPr>
-          <p:cNvPr id="2" name="投影片影像版面配置區 1">
-            <a:extLst>
-              <a:ext uri="{FF2B5EF4-FFF2-40B4-BE49-F238E27FC236}">
-                <a16:creationId xmlns:a16="http://schemas.microsoft.com/office/drawing/2014/main" id="{BD260368-4C0A-E853-26ED-C854BE471F49}"/>
-              </a:ext>
-            </a:extLst>
-          </p:cNvPr>
-          <p:cNvSpPr>
-            <a:spLocks noGrp="1" noRot="1" noChangeAspect="1"/>
-          </p:cNvSpPr>
-          <p:nvPr>
-            <p:ph type="sldImg"/>
-          </p:nvPr>
-        </p:nvSpPr>
-        <p:spPr>
-          <a:xfrm>
-            <a:off x="2560638" y="1143000"/>
-            <a:ext cx="1736725" cy="3086100"/>
-          </a:xfrm>
-        </p:spPr>
-      </p:sp>
-      <p:sp>
-        <p:nvSpPr>
-          <p:cNvPr id="3" name="備忘稿版面配置區 2">
-            <a:extLst>
-              <a:ext uri="{FF2B5EF4-FFF2-40B4-BE49-F238E27FC236}">
-                <a16:creationId xmlns:a16="http://schemas.microsoft.com/office/drawing/2014/main" id="{F5BDDD1D-045E-601C-2B7D-FBE6865C8A98}"/>
-              </a:ext>
-            </a:extLst>
-          </p:cNvPr>
-          <p:cNvSpPr>
-            <a:spLocks noGrp="1"/>
-          </p:cNvSpPr>
-          <p:nvPr>
-            <p:ph type="body" idx="1"/>
-          </p:nvPr>
-        </p:nvSpPr>
-        <p:spPr/>
-        <p:txBody>
-          <a:bodyPr/>
-          <a:lstStyle/>
-          <a:p>
-            <a:endParaRPr lang="zh-TW" altLang="en-US">
-              <a:latin typeface="Microsoft JhengHei UI" panose="020B0604030504040204" pitchFamily="34" charset="-120"/>
-              <a:ea typeface="Microsoft JhengHei UI" panose="020B0604030504040204" pitchFamily="34" charset="-120"/>
-            </a:endParaRPr>
-          </a:p>
-        </p:txBody>
-      </p:sp>
-      <p:sp>
-        <p:nvSpPr>
-          <p:cNvPr id="4" name="投影片編號版面配置區 3">
-            <a:extLst>
-              <a:ext uri="{FF2B5EF4-FFF2-40B4-BE49-F238E27FC236}">
-                <a16:creationId xmlns:a16="http://schemas.microsoft.com/office/drawing/2014/main" id="{B0A7AC19-968D-4AA6-E505-306772C89207}"/>
-              </a:ext>
-            </a:extLst>
-          </p:cNvPr>
-          <p:cNvSpPr>
-            <a:spLocks noGrp="1"/>
-          </p:cNvSpPr>
-          <p:nvPr>
-            <p:ph type="sldNum" sz="quarter" idx="5"/>
-          </p:nvPr>
-        </p:nvSpPr>
-        <p:spPr/>
-        <p:txBody>
-          <a:bodyPr/>
-          <a:lstStyle/>
-          <a:p>
-            <a:pPr rtl="0"/>
-            <a:fld id="{D5939589-3E79-4C82-AA4A-FE78234FAA59}" type="slidenum">
-              <a:rPr lang="en-US" altLang="zh-TW" smtClean="0">
-                <a:latin typeface="Microsoft JhengHei UI" panose="020B0604030504040204" pitchFamily="34" charset="-120"/>
-                <a:ea typeface="Microsoft JhengHei UI" panose="020B0604030504040204" pitchFamily="34" charset="-120"/>
-              </a:rPr>
-              <a:t>5</a:t>
-            </a:fld>
-            <a:endParaRPr lang="zh-TW" altLang="en-US">
-              <a:latin typeface="Microsoft JhengHei UI" panose="020B0604030504040204" pitchFamily="34" charset="-120"/>
-              <a:ea typeface="Microsoft JhengHei UI" panose="020B0604030504040204" pitchFamily="34" charset="-120"/>
-            </a:endParaRPr>
-          </a:p>
-        </p:txBody>
-      </p:sp>
-    </p:spTree>
-    <p:extLst>
-      <p:ext uri="{BB962C8B-B14F-4D97-AF65-F5344CB8AC3E}">
-        <p14:creationId xmlns:p14="http://schemas.microsoft.com/office/powerpoint/2010/main" val="1943482580"/>
       </p:ext>
     </p:extLst>
   </p:cSld>
@@ -11913,7 +11913,7 @@
 </file>
 
 <file path=ppt/slides/slide19.xml><?xml version="1.0" encoding="utf-8"?>
-<p:sld xmlns:a="http://schemas.openxmlformats.org/drawingml/2006/main" xmlns:r="http://schemas.openxmlformats.org/officeDocument/2006/relationships" xmlns:p="http://schemas.openxmlformats.org/presentationml/2006/main" show="0">
+<p:sld xmlns:a="http://schemas.openxmlformats.org/drawingml/2006/main" xmlns:r="http://schemas.openxmlformats.org/officeDocument/2006/relationships" xmlns:p="http://schemas.openxmlformats.org/presentationml/2006/main">
   <p:cSld>
     <p:spTree>
       <p:nvGrpSpPr>
@@ -12218,7 +12218,7 @@
         <p:cNvPr id="1" name="">
           <a:extLst>
             <a:ext uri="{FF2B5EF4-FFF2-40B4-BE49-F238E27FC236}">
-              <a16:creationId xmlns:a16="http://schemas.microsoft.com/office/drawing/2014/main" id="{C55DD506-8162-C3AE-18B3-4F9D8233098C}"/>
+              <a16:creationId xmlns:a16="http://schemas.microsoft.com/office/drawing/2014/main" id="{1D990DBE-5289-4349-E226-F52D71E060F6}"/>
             </a:ext>
           </a:extLst>
         </p:cNvPr>
@@ -12238,7 +12238,7 @@
           <p:cNvPr id="11" name="投影片編號版面配置區 10">
             <a:extLst>
               <a:ext uri="{FF2B5EF4-FFF2-40B4-BE49-F238E27FC236}">
-                <a16:creationId xmlns:a16="http://schemas.microsoft.com/office/drawing/2014/main" id="{2AC69361-9F50-D73C-6145-04226548DFD0}"/>
+                <a16:creationId xmlns:a16="http://schemas.microsoft.com/office/drawing/2014/main" id="{D41822CD-8F20-37A7-AD83-5E05E761F77D}"/>
               </a:ext>
             </a:extLst>
           </p:cNvPr>
@@ -12275,7 +12275,7 @@
           <p:cNvPr id="7" name="標題 6">
             <a:extLst>
               <a:ext uri="{FF2B5EF4-FFF2-40B4-BE49-F238E27FC236}">
-                <a16:creationId xmlns:a16="http://schemas.microsoft.com/office/drawing/2014/main" id="{70AC146E-0FF6-2C2A-64E9-59B560848566}"/>
+                <a16:creationId xmlns:a16="http://schemas.microsoft.com/office/drawing/2014/main" id="{D96B03C8-ADC4-DD31-CC94-4760EAAC2376}"/>
               </a:ext>
             </a:extLst>
           </p:cNvPr>
@@ -12288,14 +12288,12 @@
         </p:nvSpPr>
         <p:spPr>
           <a:xfrm>
-            <a:off x="237489" y="885138"/>
-            <a:ext cx="6149023" cy="509524"/>
+            <a:off x="237490" y="885138"/>
+            <a:ext cx="5280808" cy="509524"/>
           </a:xfrm>
         </p:spPr>
         <p:txBody>
-          <a:bodyPr>
-            <a:normAutofit fontScale="90000"/>
-          </a:bodyPr>
+          <a:bodyPr/>
           <a:lstStyle/>
           <a:p>
             <a:r>
@@ -12303,55 +12301,21 @@
                 <a:latin typeface="Noto Serif TC Black" panose="02020200000000000000" pitchFamily="18" charset="-128"/>
                 <a:ea typeface="Noto Serif TC Black" panose="02020200000000000000" pitchFamily="18" charset="-128"/>
               </a:rPr>
-              <a:t>四聲八調</a:t>
+              <a:t>四聲八調：</a:t>
             </a:r>
             <a:r>
               <a:rPr lang="en-US" altLang="zh-TW" dirty="0">
                 <a:latin typeface="Noto Serif TC Black" panose="02020200000000000000" pitchFamily="18" charset="-128"/>
                 <a:ea typeface="Noto Serif TC Black" panose="02020200000000000000" pitchFamily="18" charset="-128"/>
               </a:rPr>
-              <a:t>-</a:t>
+              <a:t>W</a:t>
             </a:r>
             <a:r>
               <a:rPr lang="zh-TW" altLang="en-US" dirty="0">
                 <a:latin typeface="Noto Serif TC Black" panose="02020200000000000000" pitchFamily="18" charset="-128"/>
                 <a:ea typeface="Noto Serif TC Black" panose="02020200000000000000" pitchFamily="18" charset="-128"/>
               </a:rPr>
-              <a:t>不用</a:t>
-            </a:r>
-            <a:r>
-              <a:rPr lang="zh-TW" altLang="en-US" strike="sngStrike" dirty="0">
-                <a:solidFill>
-                  <a:schemeClr val="accent5"/>
-                </a:solidFill>
-                <a:latin typeface="Noto Serif TC Black" panose="02020200000000000000" pitchFamily="18" charset="-128"/>
-                <a:ea typeface="Noto Serif TC Black" panose="02020200000000000000" pitchFamily="18" charset="-128"/>
-              </a:rPr>
-              <a:t>調符</a:t>
-            </a:r>
-            <a:r>
-              <a:rPr lang="zh-TW" altLang="en-US" dirty="0">
-                <a:latin typeface="Noto Serif TC Black" panose="02020200000000000000" pitchFamily="18" charset="-128"/>
-                <a:ea typeface="Noto Serif TC Black" panose="02020200000000000000" pitchFamily="18" charset="-128"/>
-              </a:rPr>
-              <a:t>，以數值</a:t>
-            </a:r>
-            <a:r>
-              <a:rPr lang="zh-TW" altLang="en-US" dirty="0">
-                <a:solidFill>
-                  <a:srgbClr val="FF0000"/>
-                </a:solidFill>
-                <a:latin typeface="Noto Serif TC Black" panose="02020200000000000000" pitchFamily="18" charset="-128"/>
-                <a:ea typeface="Noto Serif TC Black" panose="02020200000000000000" pitchFamily="18" charset="-128"/>
-              </a:rPr>
-              <a:t>調號</a:t>
-            </a:r>
-            <a:r>
-              <a:rPr lang="zh-TW" altLang="en-US" dirty="0">
-                <a:latin typeface="Noto Serif TC Black" panose="02020200000000000000" pitchFamily="18" charset="-128"/>
-                <a:ea typeface="Noto Serif TC Black" panose="02020200000000000000" pitchFamily="18" charset="-128"/>
-              </a:rPr>
-              <a:t>表聲調</a:t>
+              <a:t>助記法</a:t>
             </a:r>
             <a:endParaRPr lang="zh-TW" altLang="en-US" dirty="0">
               <a:solidFill>
@@ -12366,7 +12330,7 @@
           <p:cNvPr id="4" name="圖片 3">
             <a:extLst>
               <a:ext uri="{FF2B5EF4-FFF2-40B4-BE49-F238E27FC236}">
-                <a16:creationId xmlns:a16="http://schemas.microsoft.com/office/drawing/2014/main" id="{D1DE571B-F85B-3A9C-715B-818279943620}"/>
+                <a16:creationId xmlns:a16="http://schemas.microsoft.com/office/drawing/2014/main" id="{E551D755-1A0B-9283-E1F8-F1FDC38DD796}"/>
               </a:ext>
             </a:extLst>
           </p:cNvPr>
@@ -12383,8 +12347,8 @@
         </p:blipFill>
         <p:spPr>
           <a:xfrm>
-            <a:off x="504825" y="1946202"/>
-            <a:ext cx="5832292" cy="4071826"/>
+            <a:off x="476250" y="1747837"/>
+            <a:ext cx="5810250" cy="4219575"/>
           </a:xfrm>
           <a:prstGeom prst="rect">
             <a:avLst/>
@@ -12393,10 +12357,10 @@
       </p:pic>
       <p:pic>
         <p:nvPicPr>
-          <p:cNvPr id="5" name="圖片 4">
+          <p:cNvPr id="5" name="圖片 4" descr="一張含有 文字, 行, 螢幕擷取畫面, 圖表 的圖片&#10;&#10;AI 產生的內容可能不正確。">
             <a:extLst>
               <a:ext uri="{FF2B5EF4-FFF2-40B4-BE49-F238E27FC236}">
-                <a16:creationId xmlns:a16="http://schemas.microsoft.com/office/drawing/2014/main" id="{D09D8288-F301-7287-43A1-6D2B3305434A}"/>
+                <a16:creationId xmlns:a16="http://schemas.microsoft.com/office/drawing/2014/main" id="{BD26EB20-4BCE-8B16-A05B-427783E6D765}"/>
               </a:ext>
             </a:extLst>
           </p:cNvPr>
@@ -12406,25 +12370,288 @@
           <p:nvPr/>
         </p:nvPicPr>
         <p:blipFill>
-          <a:blip r:embed="rId4"/>
+          <a:blip r:embed="rId4">
+            <a:extLst>
+              <a:ext uri="{28A0092B-C50C-407E-A947-70E740481C1C}">
+                <a14:useLocalDpi xmlns:a14="http://schemas.microsoft.com/office/drawing/2010/main" val="0"/>
+              </a:ext>
+            </a:extLst>
+          </a:blip>
           <a:stretch>
             <a:fillRect/>
           </a:stretch>
         </p:blipFill>
         <p:spPr>
           <a:xfrm>
-            <a:off x="504825" y="7027689"/>
-            <a:ext cx="5832292" cy="4071826"/>
+            <a:off x="0" y="8257764"/>
+            <a:ext cx="6858000" cy="3857625"/>
           </a:xfrm>
           <a:prstGeom prst="rect">
             <a:avLst/>
           </a:prstGeom>
         </p:spPr>
       </p:pic>
+      <p:grpSp>
+        <p:nvGrpSpPr>
+          <p:cNvPr id="2" name="群組 1">
+            <a:extLst>
+              <a:ext uri="{FF2B5EF4-FFF2-40B4-BE49-F238E27FC236}">
+                <a16:creationId xmlns:a16="http://schemas.microsoft.com/office/drawing/2014/main" id="{66FEF95D-B05C-B665-8946-D866BF066453}"/>
+              </a:ext>
+            </a:extLst>
+          </p:cNvPr>
+          <p:cNvGrpSpPr/>
+          <p:nvPr/>
+        </p:nvGrpSpPr>
+        <p:grpSpPr>
+          <a:xfrm>
+            <a:off x="476250" y="6434524"/>
+            <a:ext cx="5933229" cy="1657143"/>
+            <a:chOff x="453284" y="7347647"/>
+            <a:chExt cx="5933229" cy="1657143"/>
+          </a:xfrm>
+        </p:grpSpPr>
+        <p:grpSp>
+          <p:nvGrpSpPr>
+            <p:cNvPr id="3" name="群組 2">
+              <a:extLst>
+                <a:ext uri="{FF2B5EF4-FFF2-40B4-BE49-F238E27FC236}">
+                  <a16:creationId xmlns:a16="http://schemas.microsoft.com/office/drawing/2014/main" id="{B6F61512-F6A6-E670-F37C-B7E9C4ECA8EA}"/>
+                </a:ext>
+              </a:extLst>
+            </p:cNvPr>
+            <p:cNvGrpSpPr/>
+            <p:nvPr/>
+          </p:nvGrpSpPr>
+          <p:grpSpPr>
+            <a:xfrm>
+              <a:off x="453284" y="7347647"/>
+              <a:ext cx="203835" cy="1070858"/>
+              <a:chOff x="453284" y="7347647"/>
+              <a:chExt cx="203835" cy="1070858"/>
+            </a:xfrm>
+          </p:grpSpPr>
+          <p:sp>
+            <p:nvSpPr>
+              <p:cNvPr id="8" name="文字方塊 7">
+                <a:extLst>
+                  <a:ext uri="{FF2B5EF4-FFF2-40B4-BE49-F238E27FC236}">
+                    <a16:creationId xmlns:a16="http://schemas.microsoft.com/office/drawing/2014/main" id="{A03B8591-B4CA-EF15-212D-1CE1FAF23E74}"/>
+                  </a:ext>
+                </a:extLst>
+              </p:cNvPr>
+              <p:cNvSpPr txBox="1"/>
+              <p:nvPr/>
+            </p:nvSpPr>
+            <p:spPr>
+              <a:xfrm>
+                <a:off x="453284" y="7347647"/>
+                <a:ext cx="203835" cy="246221"/>
+              </a:xfrm>
+              <a:prstGeom prst="rect">
+                <a:avLst/>
+              </a:prstGeom>
+              <a:noFill/>
+            </p:spPr>
+            <p:txBody>
+              <a:bodyPr wrap="square" lIns="36000" tIns="0" rIns="36000" bIns="0" rtlCol="0">
+                <a:spAutoFit/>
+              </a:bodyPr>
+              <a:lstStyle/>
+              <a:p>
+                <a:pPr algn="ctr"/>
+                <a:r>
+                  <a:rPr lang="en-US" altLang="zh-TW" sz="1600" dirty="0"/>
+                  <a:t>5</a:t>
+                </a:r>
+                <a:endParaRPr lang="zh-TW" altLang="en-US" sz="1600" dirty="0"/>
+              </a:p>
+            </p:txBody>
+          </p:sp>
+          <p:sp>
+            <p:nvSpPr>
+              <p:cNvPr id="9" name="文字方塊 8">
+                <a:extLst>
+                  <a:ext uri="{FF2B5EF4-FFF2-40B4-BE49-F238E27FC236}">
+                    <a16:creationId xmlns:a16="http://schemas.microsoft.com/office/drawing/2014/main" id="{79243141-E479-2708-5C10-DEB2995ED7D4}"/>
+                  </a:ext>
+                </a:extLst>
+              </p:cNvPr>
+              <p:cNvSpPr txBox="1"/>
+              <p:nvPr/>
+            </p:nvSpPr>
+            <p:spPr>
+              <a:xfrm>
+                <a:off x="453284" y="7553806"/>
+                <a:ext cx="203835" cy="246221"/>
+              </a:xfrm>
+              <a:prstGeom prst="rect">
+                <a:avLst/>
+              </a:prstGeom>
+              <a:noFill/>
+            </p:spPr>
+            <p:txBody>
+              <a:bodyPr wrap="square" lIns="36000" tIns="0" rIns="36000" bIns="0" rtlCol="0">
+                <a:spAutoFit/>
+              </a:bodyPr>
+              <a:lstStyle/>
+              <a:p>
+                <a:pPr algn="ctr"/>
+                <a:r>
+                  <a:rPr lang="en-US" altLang="zh-TW" sz="1600" dirty="0"/>
+                  <a:t>4</a:t>
+                </a:r>
+                <a:endParaRPr lang="zh-TW" altLang="en-US" sz="1600" dirty="0"/>
+              </a:p>
+            </p:txBody>
+          </p:sp>
+          <p:sp>
+            <p:nvSpPr>
+              <p:cNvPr id="10" name="文字方塊 9">
+                <a:extLst>
+                  <a:ext uri="{FF2B5EF4-FFF2-40B4-BE49-F238E27FC236}">
+                    <a16:creationId xmlns:a16="http://schemas.microsoft.com/office/drawing/2014/main" id="{11F4875C-D91E-DD38-4752-7260727B56B1}"/>
+                  </a:ext>
+                </a:extLst>
+              </p:cNvPr>
+              <p:cNvSpPr txBox="1"/>
+              <p:nvPr/>
+            </p:nvSpPr>
+            <p:spPr>
+              <a:xfrm>
+                <a:off x="453284" y="7966124"/>
+                <a:ext cx="203835" cy="246221"/>
+              </a:xfrm>
+              <a:prstGeom prst="rect">
+                <a:avLst/>
+              </a:prstGeom>
+              <a:noFill/>
+            </p:spPr>
+            <p:txBody>
+              <a:bodyPr wrap="square" lIns="36000" tIns="0" rIns="36000" bIns="0" rtlCol="0">
+                <a:spAutoFit/>
+              </a:bodyPr>
+              <a:lstStyle/>
+              <a:p>
+                <a:pPr algn="ctr"/>
+                <a:r>
+                  <a:rPr lang="en-US" altLang="zh-TW" sz="1600" dirty="0"/>
+                  <a:t>2</a:t>
+                </a:r>
+                <a:endParaRPr lang="zh-TW" altLang="en-US" sz="1600" dirty="0"/>
+              </a:p>
+            </p:txBody>
+          </p:sp>
+          <p:sp>
+            <p:nvSpPr>
+              <p:cNvPr id="12" name="文字方塊 11">
+                <a:extLst>
+                  <a:ext uri="{FF2B5EF4-FFF2-40B4-BE49-F238E27FC236}">
+                    <a16:creationId xmlns:a16="http://schemas.microsoft.com/office/drawing/2014/main" id="{C7FE51A9-79A2-87CD-7D8D-54423AE37316}"/>
+                  </a:ext>
+                </a:extLst>
+              </p:cNvPr>
+              <p:cNvSpPr txBox="1"/>
+              <p:nvPr/>
+            </p:nvSpPr>
+            <p:spPr>
+              <a:xfrm>
+                <a:off x="453284" y="7759965"/>
+                <a:ext cx="203835" cy="246221"/>
+              </a:xfrm>
+              <a:prstGeom prst="rect">
+                <a:avLst/>
+              </a:prstGeom>
+              <a:noFill/>
+            </p:spPr>
+            <p:txBody>
+              <a:bodyPr wrap="square" lIns="36000" tIns="0" rIns="36000" bIns="0" rtlCol="0">
+                <a:spAutoFit/>
+              </a:bodyPr>
+              <a:lstStyle/>
+              <a:p>
+                <a:pPr algn="ctr"/>
+                <a:r>
+                  <a:rPr lang="en-US" altLang="zh-TW" sz="1600" dirty="0"/>
+                  <a:t>3</a:t>
+                </a:r>
+                <a:endParaRPr lang="zh-TW" altLang="en-US" sz="1600" dirty="0"/>
+              </a:p>
+            </p:txBody>
+          </p:sp>
+          <p:sp>
+            <p:nvSpPr>
+              <p:cNvPr id="13" name="文字方塊 12">
+                <a:extLst>
+                  <a:ext uri="{FF2B5EF4-FFF2-40B4-BE49-F238E27FC236}">
+                    <a16:creationId xmlns:a16="http://schemas.microsoft.com/office/drawing/2014/main" id="{8687EAC3-123C-46FA-0EF0-BCD0B20F820F}"/>
+                  </a:ext>
+                </a:extLst>
+              </p:cNvPr>
+              <p:cNvSpPr txBox="1"/>
+              <p:nvPr/>
+            </p:nvSpPr>
+            <p:spPr>
+              <a:xfrm>
+                <a:off x="453284" y="8172284"/>
+                <a:ext cx="203835" cy="246221"/>
+              </a:xfrm>
+              <a:prstGeom prst="rect">
+                <a:avLst/>
+              </a:prstGeom>
+              <a:noFill/>
+            </p:spPr>
+            <p:txBody>
+              <a:bodyPr wrap="square" lIns="36000" tIns="0" rIns="36000" bIns="0" rtlCol="0">
+                <a:spAutoFit/>
+              </a:bodyPr>
+              <a:lstStyle/>
+              <a:p>
+                <a:pPr algn="ctr"/>
+                <a:r>
+                  <a:rPr lang="en-US" altLang="zh-TW" sz="1600" dirty="0"/>
+                  <a:t>1</a:t>
+                </a:r>
+                <a:endParaRPr lang="zh-TW" altLang="en-US" sz="1600" dirty="0"/>
+              </a:p>
+            </p:txBody>
+          </p:sp>
+        </p:grpSp>
+        <p:pic>
+          <p:nvPicPr>
+            <p:cNvPr id="6" name="圖片 5">
+              <a:extLst>
+                <a:ext uri="{FF2B5EF4-FFF2-40B4-BE49-F238E27FC236}">
+                  <a16:creationId xmlns:a16="http://schemas.microsoft.com/office/drawing/2014/main" id="{AF35D11F-9E46-0341-2861-2F66309CC7C7}"/>
+                </a:ext>
+              </a:extLst>
+            </p:cNvPr>
+            <p:cNvPicPr>
+              <a:picLocks noChangeAspect="1"/>
+            </p:cNvPicPr>
+            <p:nvPr/>
+          </p:nvPicPr>
+          <p:blipFill>
+            <a:blip r:embed="rId5"/>
+            <a:stretch>
+              <a:fillRect/>
+            </a:stretch>
+          </p:blipFill>
+          <p:spPr>
+            <a:xfrm>
+              <a:off x="615084" y="7347647"/>
+              <a:ext cx="5771429" cy="1657143"/>
+            </a:xfrm>
+            <a:prstGeom prst="rect">
+              <a:avLst/>
+            </a:prstGeom>
+          </p:spPr>
+        </p:pic>
+      </p:grpSp>
     </p:spTree>
     <p:extLst>
       <p:ext uri="{BB962C8B-B14F-4D97-AF65-F5344CB8AC3E}">
-        <p14:creationId xmlns:p14="http://schemas.microsoft.com/office/powerpoint/2010/main" val="626545437"/>
+        <p14:creationId xmlns:p14="http://schemas.microsoft.com/office/powerpoint/2010/main" val="2650364132"/>
       </p:ext>
     </p:extLst>
   </p:cSld>
@@ -16632,6 +16859,213 @@
         <p:cNvPr id="1" name="">
           <a:extLst>
             <a:ext uri="{FF2B5EF4-FFF2-40B4-BE49-F238E27FC236}">
+              <a16:creationId xmlns:a16="http://schemas.microsoft.com/office/drawing/2014/main" id="{C55DD506-8162-C3AE-18B3-4F9D8233098C}"/>
+            </a:ext>
+          </a:extLst>
+        </p:cNvPr>
+        <p:cNvGrpSpPr/>
+        <p:nvPr/>
+      </p:nvGrpSpPr>
+      <p:grpSpPr>
+        <a:xfrm>
+          <a:off x="0" y="0"/>
+          <a:ext cx="0" cy="0"/>
+          <a:chOff x="0" y="0"/>
+          <a:chExt cx="0" cy="0"/>
+        </a:xfrm>
+      </p:grpSpPr>
+      <p:sp>
+        <p:nvSpPr>
+          <p:cNvPr id="11" name="投影片編號版面配置區 10">
+            <a:extLst>
+              <a:ext uri="{FF2B5EF4-FFF2-40B4-BE49-F238E27FC236}">
+                <a16:creationId xmlns:a16="http://schemas.microsoft.com/office/drawing/2014/main" id="{2AC69361-9F50-D73C-6145-04226548DFD0}"/>
+              </a:ext>
+            </a:extLst>
+          </p:cNvPr>
+          <p:cNvSpPr>
+            <a:spLocks noGrp="1"/>
+          </p:cNvSpPr>
+          <p:nvPr>
+            <p:ph type="sldNum" sz="quarter" idx="12"/>
+          </p:nvPr>
+        </p:nvSpPr>
+        <p:spPr/>
+        <p:txBody>
+          <a:bodyPr rtlCol="0"/>
+          <a:lstStyle/>
+          <a:p>
+            <a:pPr rtl="0"/>
+            <a:fld id="{D8DA9DAA-006C-4F4B-980E-E3DF019B24E2}" type="slidenum">
+              <a:rPr lang="en-US" altLang="zh-TW" smtClean="0">
+                <a:latin typeface="Microsoft JhengHei UI" panose="020B0604030504040204" pitchFamily="34" charset="-120"/>
+                <a:ea typeface="Microsoft JhengHei UI" panose="020B0604030504040204" pitchFamily="34" charset="-120"/>
+              </a:rPr>
+              <a:pPr rtl="0"/>
+              <a:t>4</a:t>
+            </a:fld>
+            <a:endParaRPr lang="zh-TW" altLang="en-US">
+              <a:latin typeface="Microsoft JhengHei UI" panose="020B0604030504040204" pitchFamily="34" charset="-120"/>
+              <a:ea typeface="Microsoft JhengHei UI" panose="020B0604030504040204" pitchFamily="34" charset="-120"/>
+            </a:endParaRPr>
+          </a:p>
+        </p:txBody>
+      </p:sp>
+      <p:sp>
+        <p:nvSpPr>
+          <p:cNvPr id="7" name="標題 6">
+            <a:extLst>
+              <a:ext uri="{FF2B5EF4-FFF2-40B4-BE49-F238E27FC236}">
+                <a16:creationId xmlns:a16="http://schemas.microsoft.com/office/drawing/2014/main" id="{70AC146E-0FF6-2C2A-64E9-59B560848566}"/>
+              </a:ext>
+            </a:extLst>
+          </p:cNvPr>
+          <p:cNvSpPr>
+            <a:spLocks noGrp="1"/>
+          </p:cNvSpPr>
+          <p:nvPr>
+            <p:ph type="title"/>
+          </p:nvPr>
+        </p:nvSpPr>
+        <p:spPr>
+          <a:xfrm>
+            <a:off x="237489" y="885138"/>
+            <a:ext cx="6149023" cy="509524"/>
+          </a:xfrm>
+        </p:spPr>
+        <p:txBody>
+          <a:bodyPr>
+            <a:normAutofit/>
+          </a:bodyPr>
+          <a:lstStyle/>
+          <a:p>
+            <a:r>
+              <a:rPr lang="zh-TW" altLang="en-US" dirty="0">
+                <a:latin typeface="Noto Serif TC Black" panose="02020200000000000000" pitchFamily="18" charset="-128"/>
+                <a:ea typeface="Noto Serif TC Black" panose="02020200000000000000" pitchFamily="18" charset="-128"/>
+              </a:rPr>
+              <a:t>四聲八</a:t>
+            </a:r>
+            <a:r>
+              <a:rPr lang="zh-TW" altLang="en-US">
+                <a:latin typeface="Noto Serif TC Black" panose="02020200000000000000" pitchFamily="18" charset="-128"/>
+                <a:ea typeface="Noto Serif TC Black" panose="02020200000000000000" pitchFamily="18" charset="-128"/>
+              </a:rPr>
+              <a:t>調</a:t>
+            </a:r>
+            <a:r>
+              <a:rPr lang="en-US" altLang="zh-TW">
+                <a:latin typeface="Noto Serif TC Black" panose="02020200000000000000" pitchFamily="18" charset="-128"/>
+                <a:ea typeface="Noto Serif TC Black" panose="02020200000000000000" pitchFamily="18" charset="-128"/>
+              </a:rPr>
+              <a:t>-</a:t>
+            </a:r>
+            <a:r>
+              <a:rPr lang="zh-TW" altLang="en-US">
+                <a:solidFill>
+                  <a:srgbClr val="FF0000"/>
+                </a:solidFill>
+                <a:latin typeface="Noto Serif TC Black" panose="02020200000000000000" pitchFamily="18" charset="-128"/>
+                <a:ea typeface="Noto Serif TC Black" panose="02020200000000000000" pitchFamily="18" charset="-128"/>
+              </a:rPr>
+              <a:t>聲調</a:t>
+            </a:r>
+            <a:r>
+              <a:rPr lang="zh-TW" altLang="en-US">
+                <a:latin typeface="Noto Serif TC Black" panose="02020200000000000000" pitchFamily="18" charset="-128"/>
+                <a:ea typeface="Noto Serif TC Black" panose="02020200000000000000" pitchFamily="18" charset="-128"/>
+              </a:rPr>
+              <a:t>排序規則</a:t>
+            </a:r>
+            <a:endParaRPr lang="zh-TW" altLang="en-US" dirty="0">
+              <a:solidFill>
+                <a:schemeClr val="accent5"/>
+              </a:solidFill>
+            </a:endParaRPr>
+          </a:p>
+        </p:txBody>
+      </p:sp>
+      <p:pic>
+        <p:nvPicPr>
+          <p:cNvPr id="4" name="圖片 3">
+            <a:extLst>
+              <a:ext uri="{FF2B5EF4-FFF2-40B4-BE49-F238E27FC236}">
+                <a16:creationId xmlns:a16="http://schemas.microsoft.com/office/drawing/2014/main" id="{D1DE571B-F85B-3A9C-715B-818279943620}"/>
+              </a:ext>
+            </a:extLst>
+          </p:cNvPr>
+          <p:cNvPicPr>
+            <a:picLocks noChangeAspect="1"/>
+          </p:cNvPicPr>
+          <p:nvPr/>
+        </p:nvPicPr>
+        <p:blipFill>
+          <a:blip r:embed="rId3"/>
+          <a:stretch>
+            <a:fillRect/>
+          </a:stretch>
+        </p:blipFill>
+        <p:spPr>
+          <a:xfrm>
+            <a:off x="504825" y="1946202"/>
+            <a:ext cx="5832292" cy="4071826"/>
+          </a:xfrm>
+          <a:prstGeom prst="rect">
+            <a:avLst/>
+          </a:prstGeom>
+        </p:spPr>
+      </p:pic>
+      <p:pic>
+        <p:nvPicPr>
+          <p:cNvPr id="5" name="圖片 4">
+            <a:extLst>
+              <a:ext uri="{FF2B5EF4-FFF2-40B4-BE49-F238E27FC236}">
+                <a16:creationId xmlns:a16="http://schemas.microsoft.com/office/drawing/2014/main" id="{D09D8288-F301-7287-43A1-6D2B3305434A}"/>
+              </a:ext>
+            </a:extLst>
+          </p:cNvPr>
+          <p:cNvPicPr>
+            <a:picLocks noChangeAspect="1"/>
+          </p:cNvPicPr>
+          <p:nvPr/>
+        </p:nvPicPr>
+        <p:blipFill>
+          <a:blip r:embed="rId4"/>
+          <a:stretch>
+            <a:fillRect/>
+          </a:stretch>
+        </p:blipFill>
+        <p:spPr>
+          <a:xfrm>
+            <a:off x="504825" y="7027689"/>
+            <a:ext cx="5832292" cy="4071826"/>
+          </a:xfrm>
+          <a:prstGeom prst="rect">
+            <a:avLst/>
+          </a:prstGeom>
+        </p:spPr>
+      </p:pic>
+    </p:spTree>
+    <p:extLst>
+      <p:ext uri="{BB962C8B-B14F-4D97-AF65-F5344CB8AC3E}">
+        <p14:creationId xmlns:p14="http://schemas.microsoft.com/office/powerpoint/2010/main" val="626545437"/>
+      </p:ext>
+    </p:extLst>
+  </p:cSld>
+  <p:clrMapOvr>
+    <a:masterClrMapping/>
+  </p:clrMapOvr>
+</p:sld>
+</file>
+
+<file path=ppt/slides/slide5.xml><?xml version="1.0" encoding="utf-8"?>
+<p:sld xmlns:a="http://schemas.openxmlformats.org/drawingml/2006/main" xmlns:r="http://schemas.openxmlformats.org/officeDocument/2006/relationships" xmlns:p="http://schemas.openxmlformats.org/presentationml/2006/main">
+  <p:cSld>
+    <p:spTree>
+      <p:nvGrpSpPr>
+        <p:cNvPr id="1" name="">
+          <a:extLst>
+            <a:ext uri="{FF2B5EF4-FFF2-40B4-BE49-F238E27FC236}">
               <a16:creationId xmlns:a16="http://schemas.microsoft.com/office/drawing/2014/main" id="{D235AC59-D32E-93C6-A856-5410CCFDC6A8}"/>
             </a:ext>
           </a:extLst>
@@ -16675,7 +17109,7 @@
                 <a:ea typeface="Microsoft JhengHei UI" panose="020B0604030504040204" pitchFamily="34" charset="-120"/>
               </a:rPr>
               <a:pPr rtl="0"/>
-              <a:t>4</a:t>
+              <a:t>5</a:t>
             </a:fld>
             <a:endParaRPr lang="zh-TW" altLang="en-US">
               <a:latin typeface="Microsoft JhengHei UI" panose="020B0604030504040204" pitchFamily="34" charset="-120"/>
@@ -16757,140 +17191,12 @@
           </a:prstGeom>
         </p:spPr>
       </p:pic>
-    </p:spTree>
-    <p:extLst>
-      <p:ext uri="{BB962C8B-B14F-4D97-AF65-F5344CB8AC3E}">
-        <p14:creationId xmlns:p14="http://schemas.microsoft.com/office/powerpoint/2010/main" val="133098972"/>
-      </p:ext>
-    </p:extLst>
-  </p:cSld>
-  <p:clrMapOvr>
-    <a:masterClrMapping/>
-  </p:clrMapOvr>
-</p:sld>
-</file>
-
-<file path=ppt/slides/slide5.xml><?xml version="1.0" encoding="utf-8"?>
-<p:sld xmlns:a="http://schemas.openxmlformats.org/drawingml/2006/main" xmlns:r="http://schemas.openxmlformats.org/officeDocument/2006/relationships" xmlns:p="http://schemas.openxmlformats.org/presentationml/2006/main">
-  <p:cSld>
-    <p:spTree>
-      <p:nvGrpSpPr>
-        <p:cNvPr id="1" name="">
-          <a:extLst>
-            <a:ext uri="{FF2B5EF4-FFF2-40B4-BE49-F238E27FC236}">
-              <a16:creationId xmlns:a16="http://schemas.microsoft.com/office/drawing/2014/main" id="{1D990DBE-5289-4349-E226-F52D71E060F6}"/>
-            </a:ext>
-          </a:extLst>
-        </p:cNvPr>
-        <p:cNvGrpSpPr/>
-        <p:nvPr/>
-      </p:nvGrpSpPr>
-      <p:grpSpPr>
-        <a:xfrm>
-          <a:off x="0" y="0"/>
-          <a:ext cx="0" cy="0"/>
-          <a:chOff x="0" y="0"/>
-          <a:chExt cx="0" cy="0"/>
-        </a:xfrm>
-      </p:grpSpPr>
-      <p:sp>
-        <p:nvSpPr>
-          <p:cNvPr id="11" name="投影片編號版面配置區 10">
+      <p:pic>
+        <p:nvPicPr>
+          <p:cNvPr id="13" name="圖片 12">
             <a:extLst>
               <a:ext uri="{FF2B5EF4-FFF2-40B4-BE49-F238E27FC236}">
-                <a16:creationId xmlns:a16="http://schemas.microsoft.com/office/drawing/2014/main" id="{D41822CD-8F20-37A7-AD83-5E05E761F77D}"/>
-              </a:ext>
-            </a:extLst>
-          </p:cNvPr>
-          <p:cNvSpPr>
-            <a:spLocks noGrp="1"/>
-          </p:cNvSpPr>
-          <p:nvPr>
-            <p:ph type="sldNum" sz="quarter" idx="12"/>
-          </p:nvPr>
-        </p:nvSpPr>
-        <p:spPr/>
-        <p:txBody>
-          <a:bodyPr rtlCol="0"/>
-          <a:lstStyle/>
-          <a:p>
-            <a:pPr rtl="0"/>
-            <a:fld id="{D8DA9DAA-006C-4F4B-980E-E3DF019B24E2}" type="slidenum">
-              <a:rPr lang="en-US" altLang="zh-TW" smtClean="0">
-                <a:latin typeface="Microsoft JhengHei UI" panose="020B0604030504040204" pitchFamily="34" charset="-120"/>
-                <a:ea typeface="Microsoft JhengHei UI" panose="020B0604030504040204" pitchFamily="34" charset="-120"/>
-              </a:rPr>
-              <a:pPr rtl="0"/>
-              <a:t>5</a:t>
-            </a:fld>
-            <a:endParaRPr lang="zh-TW" altLang="en-US">
-              <a:latin typeface="Microsoft JhengHei UI" panose="020B0604030504040204" pitchFamily="34" charset="-120"/>
-              <a:ea typeface="Microsoft JhengHei UI" panose="020B0604030504040204" pitchFamily="34" charset="-120"/>
-            </a:endParaRPr>
-          </a:p>
-        </p:txBody>
-      </p:sp>
-      <p:sp>
-        <p:nvSpPr>
-          <p:cNvPr id="7" name="標題 6">
-            <a:extLst>
-              <a:ext uri="{FF2B5EF4-FFF2-40B4-BE49-F238E27FC236}">
-                <a16:creationId xmlns:a16="http://schemas.microsoft.com/office/drawing/2014/main" id="{D96B03C8-ADC4-DD31-CC94-4760EAAC2376}"/>
-              </a:ext>
-            </a:extLst>
-          </p:cNvPr>
-          <p:cNvSpPr>
-            <a:spLocks noGrp="1"/>
-          </p:cNvSpPr>
-          <p:nvPr>
-            <p:ph type="title"/>
-          </p:nvPr>
-        </p:nvSpPr>
-        <p:spPr>
-          <a:xfrm>
-            <a:off x="237490" y="885138"/>
-            <a:ext cx="5280808" cy="509524"/>
-          </a:xfrm>
-        </p:spPr>
-        <p:txBody>
-          <a:bodyPr/>
-          <a:lstStyle/>
-          <a:p>
-            <a:r>
-              <a:rPr lang="zh-TW" altLang="en-US" dirty="0">
-                <a:latin typeface="Noto Serif TC Black" panose="02020200000000000000" pitchFamily="18" charset="-128"/>
-                <a:ea typeface="Noto Serif TC Black" panose="02020200000000000000" pitchFamily="18" charset="-128"/>
-              </a:rPr>
-              <a:t>四聲八調：</a:t>
-            </a:r>
-            <a:r>
-              <a:rPr lang="en-US" altLang="zh-TW" dirty="0">
-                <a:latin typeface="Noto Serif TC Black" panose="02020200000000000000" pitchFamily="18" charset="-128"/>
-                <a:ea typeface="Noto Serif TC Black" panose="02020200000000000000" pitchFamily="18" charset="-128"/>
-              </a:rPr>
-              <a:t>W</a:t>
-            </a:r>
-            <a:r>
-              <a:rPr lang="zh-TW" altLang="en-US" dirty="0">
-                <a:latin typeface="Noto Serif TC Black" panose="02020200000000000000" pitchFamily="18" charset="-128"/>
-                <a:ea typeface="Noto Serif TC Black" panose="02020200000000000000" pitchFamily="18" charset="-128"/>
-              </a:rPr>
-              <a:t>助記法</a:t>
-            </a:r>
-            <a:endParaRPr lang="zh-TW" altLang="en-US" dirty="0">
-              <a:solidFill>
-                <a:schemeClr val="accent5"/>
-              </a:solidFill>
-            </a:endParaRPr>
-          </a:p>
-        </p:txBody>
-      </p:sp>
-      <p:pic>
-        <p:nvPicPr>
-          <p:cNvPr id="4" name="圖片 3">
-            <a:extLst>
-              <a:ext uri="{FF2B5EF4-FFF2-40B4-BE49-F238E27FC236}">
-                <a16:creationId xmlns:a16="http://schemas.microsoft.com/office/drawing/2014/main" id="{E551D755-1A0B-9283-E1F8-F1FDC38DD796}"/>
+                <a16:creationId xmlns:a16="http://schemas.microsoft.com/office/drawing/2014/main" id="{43C9A66B-6EF0-EDB4-B5EB-1A04257029DB}"/>
               </a:ext>
             </a:extLst>
           </p:cNvPr>
@@ -16900,318 +17206,25 @@
           <p:nvPr/>
         </p:nvPicPr>
         <p:blipFill>
-          <a:blip r:embed="rId3"/>
+          <a:blip r:embed="rId4"/>
           <a:stretch>
             <a:fillRect/>
           </a:stretch>
         </p:blipFill>
         <p:spPr>
           <a:xfrm>
-            <a:off x="476250" y="1747837"/>
-            <a:ext cx="5810250" cy="4219575"/>
+            <a:off x="0" y="6902672"/>
+            <a:ext cx="6858000" cy="3852672"/>
           </a:xfrm>
           <a:prstGeom prst="rect">
             <a:avLst/>
           </a:prstGeom>
         </p:spPr>
       </p:pic>
-      <p:pic>
-        <p:nvPicPr>
-          <p:cNvPr id="5" name="圖片 4" descr="一張含有 文字, 行, 螢幕擷取畫面, 圖表 的圖片&#10;&#10;AI 產生的內容可能不正確。">
-            <a:extLst>
-              <a:ext uri="{FF2B5EF4-FFF2-40B4-BE49-F238E27FC236}">
-                <a16:creationId xmlns:a16="http://schemas.microsoft.com/office/drawing/2014/main" id="{BD26EB20-4BCE-8B16-A05B-427783E6D765}"/>
-              </a:ext>
-            </a:extLst>
-          </p:cNvPr>
-          <p:cNvPicPr>
-            <a:picLocks noChangeAspect="1"/>
-          </p:cNvPicPr>
-          <p:nvPr/>
-        </p:nvPicPr>
-        <p:blipFill>
-          <a:blip r:embed="rId4">
-            <a:extLst>
-              <a:ext uri="{28A0092B-C50C-407E-A947-70E740481C1C}">
-                <a14:useLocalDpi xmlns:a14="http://schemas.microsoft.com/office/drawing/2010/main" val="0"/>
-              </a:ext>
-            </a:extLst>
-          </a:blip>
-          <a:stretch>
-            <a:fillRect/>
-          </a:stretch>
-        </p:blipFill>
-        <p:spPr>
-          <a:xfrm>
-            <a:off x="0" y="8257764"/>
-            <a:ext cx="6858000" cy="3857625"/>
-          </a:xfrm>
-          <a:prstGeom prst="rect">
-            <a:avLst/>
-          </a:prstGeom>
-        </p:spPr>
-      </p:pic>
-      <p:grpSp>
-        <p:nvGrpSpPr>
-          <p:cNvPr id="2" name="群組 1">
-            <a:extLst>
-              <a:ext uri="{FF2B5EF4-FFF2-40B4-BE49-F238E27FC236}">
-                <a16:creationId xmlns:a16="http://schemas.microsoft.com/office/drawing/2014/main" id="{66FEF95D-B05C-B665-8946-D866BF066453}"/>
-              </a:ext>
-            </a:extLst>
-          </p:cNvPr>
-          <p:cNvGrpSpPr/>
-          <p:nvPr/>
-        </p:nvGrpSpPr>
-        <p:grpSpPr>
-          <a:xfrm>
-            <a:off x="476250" y="6434524"/>
-            <a:ext cx="5933229" cy="1657143"/>
-            <a:chOff x="453284" y="7347647"/>
-            <a:chExt cx="5933229" cy="1657143"/>
-          </a:xfrm>
-        </p:grpSpPr>
-        <p:grpSp>
-          <p:nvGrpSpPr>
-            <p:cNvPr id="3" name="群組 2">
-              <a:extLst>
-                <a:ext uri="{FF2B5EF4-FFF2-40B4-BE49-F238E27FC236}">
-                  <a16:creationId xmlns:a16="http://schemas.microsoft.com/office/drawing/2014/main" id="{B6F61512-F6A6-E670-F37C-B7E9C4ECA8EA}"/>
-                </a:ext>
-              </a:extLst>
-            </p:cNvPr>
-            <p:cNvGrpSpPr/>
-            <p:nvPr/>
-          </p:nvGrpSpPr>
-          <p:grpSpPr>
-            <a:xfrm>
-              <a:off x="453284" y="7347647"/>
-              <a:ext cx="203835" cy="1070858"/>
-              <a:chOff x="453284" y="7347647"/>
-              <a:chExt cx="203835" cy="1070858"/>
-            </a:xfrm>
-          </p:grpSpPr>
-          <p:sp>
-            <p:nvSpPr>
-              <p:cNvPr id="8" name="文字方塊 7">
-                <a:extLst>
-                  <a:ext uri="{FF2B5EF4-FFF2-40B4-BE49-F238E27FC236}">
-                    <a16:creationId xmlns:a16="http://schemas.microsoft.com/office/drawing/2014/main" id="{A03B8591-B4CA-EF15-212D-1CE1FAF23E74}"/>
-                  </a:ext>
-                </a:extLst>
-              </p:cNvPr>
-              <p:cNvSpPr txBox="1"/>
-              <p:nvPr/>
-            </p:nvSpPr>
-            <p:spPr>
-              <a:xfrm>
-                <a:off x="453284" y="7347647"/>
-                <a:ext cx="203835" cy="246221"/>
-              </a:xfrm>
-              <a:prstGeom prst="rect">
-                <a:avLst/>
-              </a:prstGeom>
-              <a:noFill/>
-            </p:spPr>
-            <p:txBody>
-              <a:bodyPr wrap="square" lIns="36000" tIns="0" rIns="36000" bIns="0" rtlCol="0">
-                <a:spAutoFit/>
-              </a:bodyPr>
-              <a:lstStyle/>
-              <a:p>
-                <a:pPr algn="ctr"/>
-                <a:r>
-                  <a:rPr lang="en-US" altLang="zh-TW" sz="1600" dirty="0"/>
-                  <a:t>5</a:t>
-                </a:r>
-                <a:endParaRPr lang="zh-TW" altLang="en-US" sz="1600" dirty="0"/>
-              </a:p>
-            </p:txBody>
-          </p:sp>
-          <p:sp>
-            <p:nvSpPr>
-              <p:cNvPr id="9" name="文字方塊 8">
-                <a:extLst>
-                  <a:ext uri="{FF2B5EF4-FFF2-40B4-BE49-F238E27FC236}">
-                    <a16:creationId xmlns:a16="http://schemas.microsoft.com/office/drawing/2014/main" id="{79243141-E479-2708-5C10-DEB2995ED7D4}"/>
-                  </a:ext>
-                </a:extLst>
-              </p:cNvPr>
-              <p:cNvSpPr txBox="1"/>
-              <p:nvPr/>
-            </p:nvSpPr>
-            <p:spPr>
-              <a:xfrm>
-                <a:off x="453284" y="7553806"/>
-                <a:ext cx="203835" cy="246221"/>
-              </a:xfrm>
-              <a:prstGeom prst="rect">
-                <a:avLst/>
-              </a:prstGeom>
-              <a:noFill/>
-            </p:spPr>
-            <p:txBody>
-              <a:bodyPr wrap="square" lIns="36000" tIns="0" rIns="36000" bIns="0" rtlCol="0">
-                <a:spAutoFit/>
-              </a:bodyPr>
-              <a:lstStyle/>
-              <a:p>
-                <a:pPr algn="ctr"/>
-                <a:r>
-                  <a:rPr lang="en-US" altLang="zh-TW" sz="1600" dirty="0"/>
-                  <a:t>4</a:t>
-                </a:r>
-                <a:endParaRPr lang="zh-TW" altLang="en-US" sz="1600" dirty="0"/>
-              </a:p>
-            </p:txBody>
-          </p:sp>
-          <p:sp>
-            <p:nvSpPr>
-              <p:cNvPr id="10" name="文字方塊 9">
-                <a:extLst>
-                  <a:ext uri="{FF2B5EF4-FFF2-40B4-BE49-F238E27FC236}">
-                    <a16:creationId xmlns:a16="http://schemas.microsoft.com/office/drawing/2014/main" id="{11F4875C-D91E-DD38-4752-7260727B56B1}"/>
-                  </a:ext>
-                </a:extLst>
-              </p:cNvPr>
-              <p:cNvSpPr txBox="1"/>
-              <p:nvPr/>
-            </p:nvSpPr>
-            <p:spPr>
-              <a:xfrm>
-                <a:off x="453284" y="7966124"/>
-                <a:ext cx="203835" cy="246221"/>
-              </a:xfrm>
-              <a:prstGeom prst="rect">
-                <a:avLst/>
-              </a:prstGeom>
-              <a:noFill/>
-            </p:spPr>
-            <p:txBody>
-              <a:bodyPr wrap="square" lIns="36000" tIns="0" rIns="36000" bIns="0" rtlCol="0">
-                <a:spAutoFit/>
-              </a:bodyPr>
-              <a:lstStyle/>
-              <a:p>
-                <a:pPr algn="ctr"/>
-                <a:r>
-                  <a:rPr lang="en-US" altLang="zh-TW" sz="1600" dirty="0"/>
-                  <a:t>2</a:t>
-                </a:r>
-                <a:endParaRPr lang="zh-TW" altLang="en-US" sz="1600" dirty="0"/>
-              </a:p>
-            </p:txBody>
-          </p:sp>
-          <p:sp>
-            <p:nvSpPr>
-              <p:cNvPr id="12" name="文字方塊 11">
-                <a:extLst>
-                  <a:ext uri="{FF2B5EF4-FFF2-40B4-BE49-F238E27FC236}">
-                    <a16:creationId xmlns:a16="http://schemas.microsoft.com/office/drawing/2014/main" id="{C7FE51A9-79A2-87CD-7D8D-54423AE37316}"/>
-                  </a:ext>
-                </a:extLst>
-              </p:cNvPr>
-              <p:cNvSpPr txBox="1"/>
-              <p:nvPr/>
-            </p:nvSpPr>
-            <p:spPr>
-              <a:xfrm>
-                <a:off x="453284" y="7759965"/>
-                <a:ext cx="203835" cy="246221"/>
-              </a:xfrm>
-              <a:prstGeom prst="rect">
-                <a:avLst/>
-              </a:prstGeom>
-              <a:noFill/>
-            </p:spPr>
-            <p:txBody>
-              <a:bodyPr wrap="square" lIns="36000" tIns="0" rIns="36000" bIns="0" rtlCol="0">
-                <a:spAutoFit/>
-              </a:bodyPr>
-              <a:lstStyle/>
-              <a:p>
-                <a:pPr algn="ctr"/>
-                <a:r>
-                  <a:rPr lang="en-US" altLang="zh-TW" sz="1600" dirty="0"/>
-                  <a:t>3</a:t>
-                </a:r>
-                <a:endParaRPr lang="zh-TW" altLang="en-US" sz="1600" dirty="0"/>
-              </a:p>
-            </p:txBody>
-          </p:sp>
-          <p:sp>
-            <p:nvSpPr>
-              <p:cNvPr id="13" name="文字方塊 12">
-                <a:extLst>
-                  <a:ext uri="{FF2B5EF4-FFF2-40B4-BE49-F238E27FC236}">
-                    <a16:creationId xmlns:a16="http://schemas.microsoft.com/office/drawing/2014/main" id="{8687EAC3-123C-46FA-0EF0-BCD0B20F820F}"/>
-                  </a:ext>
-                </a:extLst>
-              </p:cNvPr>
-              <p:cNvSpPr txBox="1"/>
-              <p:nvPr/>
-            </p:nvSpPr>
-            <p:spPr>
-              <a:xfrm>
-                <a:off x="453284" y="8172284"/>
-                <a:ext cx="203835" cy="246221"/>
-              </a:xfrm>
-              <a:prstGeom prst="rect">
-                <a:avLst/>
-              </a:prstGeom>
-              <a:noFill/>
-            </p:spPr>
-            <p:txBody>
-              <a:bodyPr wrap="square" lIns="36000" tIns="0" rIns="36000" bIns="0" rtlCol="0">
-                <a:spAutoFit/>
-              </a:bodyPr>
-              <a:lstStyle/>
-              <a:p>
-                <a:pPr algn="ctr"/>
-                <a:r>
-                  <a:rPr lang="en-US" altLang="zh-TW" sz="1600" dirty="0"/>
-                  <a:t>1</a:t>
-                </a:r>
-                <a:endParaRPr lang="zh-TW" altLang="en-US" sz="1600" dirty="0"/>
-              </a:p>
-            </p:txBody>
-          </p:sp>
-        </p:grpSp>
-        <p:pic>
-          <p:nvPicPr>
-            <p:cNvPr id="6" name="圖片 5">
-              <a:extLst>
-                <a:ext uri="{FF2B5EF4-FFF2-40B4-BE49-F238E27FC236}">
-                  <a16:creationId xmlns:a16="http://schemas.microsoft.com/office/drawing/2014/main" id="{AF35D11F-9E46-0341-2861-2F66309CC7C7}"/>
-                </a:ext>
-              </a:extLst>
-            </p:cNvPr>
-            <p:cNvPicPr>
-              <a:picLocks noChangeAspect="1"/>
-            </p:cNvPicPr>
-            <p:nvPr/>
-          </p:nvPicPr>
-          <p:blipFill>
-            <a:blip r:embed="rId5"/>
-            <a:stretch>
-              <a:fillRect/>
-            </a:stretch>
-          </p:blipFill>
-          <p:spPr>
-            <a:xfrm>
-              <a:off x="615084" y="7347647"/>
-              <a:ext cx="5771429" cy="1657143"/>
-            </a:xfrm>
-            <a:prstGeom prst="rect">
-              <a:avLst/>
-            </a:prstGeom>
-          </p:spPr>
-        </p:pic>
-      </p:grpSp>
     </p:spTree>
     <p:extLst>
       <p:ext uri="{BB962C8B-B14F-4D97-AF65-F5344CB8AC3E}">
-        <p14:creationId xmlns:p14="http://schemas.microsoft.com/office/powerpoint/2010/main" val="2650364132"/>
+        <p14:creationId xmlns:p14="http://schemas.microsoft.com/office/powerpoint/2010/main" val="133098972"/>
       </p:ext>
     </p:extLst>
   </p:cSld>

--- a/docs/guide/十八音輸入方案變調操作.pptx
+++ b/docs/guide/十八音輸入方案變調操作.pptx
@@ -15,8 +15,8 @@
     <p:sldId id="357" r:id="rId6"/>
     <p:sldId id="390" r:id="rId7"/>
     <p:sldId id="388" r:id="rId8"/>
-    <p:sldId id="392" r:id="rId9"/>
-    <p:sldId id="389" r:id="rId10"/>
+    <p:sldId id="396" r:id="rId9"/>
+    <p:sldId id="392" r:id="rId10"/>
     <p:sldId id="363" r:id="rId11"/>
     <p:sldId id="364" r:id="rId12"/>
     <p:sldId id="362" r:id="rId13"/>
@@ -8643,7 +8643,7 @@
 </file>
 
 <file path=ppt/slides/slide15.xml><?xml version="1.0" encoding="utf-8"?>
-<p:sld xmlns:a="http://schemas.openxmlformats.org/drawingml/2006/main" xmlns:r="http://schemas.openxmlformats.org/officeDocument/2006/relationships" xmlns:p="http://schemas.openxmlformats.org/presentationml/2006/main">
+<p:sld xmlns:a="http://schemas.openxmlformats.org/drawingml/2006/main" xmlns:r="http://schemas.openxmlformats.org/officeDocument/2006/relationships" xmlns:p="http://schemas.openxmlformats.org/presentationml/2006/main" show="0">
   <p:cSld>
     <p:spTree>
       <p:nvGrpSpPr>
@@ -9394,7 +9394,7 @@
 </file>
 
 <file path=ppt/slides/slide16.xml><?xml version="1.0" encoding="utf-8"?>
-<p:sld xmlns:a="http://schemas.openxmlformats.org/drawingml/2006/main" xmlns:r="http://schemas.openxmlformats.org/officeDocument/2006/relationships" xmlns:p="http://schemas.openxmlformats.org/presentationml/2006/main">
+<p:sld xmlns:a="http://schemas.openxmlformats.org/drawingml/2006/main" xmlns:r="http://schemas.openxmlformats.org/officeDocument/2006/relationships" xmlns:p="http://schemas.openxmlformats.org/presentationml/2006/main" show="0">
   <p:cSld>
     <p:spTree>
       <p:nvGrpSpPr>
@@ -10115,7 +10115,7 @@
 </file>
 
 <file path=ppt/slides/slide17.xml><?xml version="1.0" encoding="utf-8"?>
-<p:sld xmlns:a="http://schemas.openxmlformats.org/drawingml/2006/main" xmlns:r="http://schemas.openxmlformats.org/officeDocument/2006/relationships" xmlns:p="http://schemas.openxmlformats.org/presentationml/2006/main">
+<p:sld xmlns:a="http://schemas.openxmlformats.org/drawingml/2006/main" xmlns:r="http://schemas.openxmlformats.org/officeDocument/2006/relationships" xmlns:p="http://schemas.openxmlformats.org/presentationml/2006/main" show="0">
   <p:cSld>
     <p:spTree>
       <p:nvGrpSpPr>
@@ -11913,7 +11913,7 @@
 </file>
 
 <file path=ppt/slides/slide19.xml><?xml version="1.0" encoding="utf-8"?>
-<p:sld xmlns:a="http://schemas.openxmlformats.org/drawingml/2006/main" xmlns:r="http://schemas.openxmlformats.org/officeDocument/2006/relationships" xmlns:p="http://schemas.openxmlformats.org/presentationml/2006/main">
+<p:sld xmlns:a="http://schemas.openxmlformats.org/drawingml/2006/main" xmlns:r="http://schemas.openxmlformats.org/officeDocument/2006/relationships" xmlns:p="http://schemas.openxmlformats.org/presentationml/2006/main" show="0">
   <p:cSld>
     <p:spTree>
       <p:nvGrpSpPr>
@@ -12155,7 +12155,7 @@
                 <a:latin typeface="Noto Serif TC Black" panose="02020200000000000000" pitchFamily="18" charset="-128"/>
                 <a:ea typeface="Noto Serif TC Black" panose="02020200000000000000" pitchFamily="18" charset="-128"/>
               </a:rPr>
-              <a:t>八調</a:t>
+              <a:t>八調（八音）</a:t>
             </a:r>
             <a:endParaRPr lang="zh-TW" altLang="en-US" dirty="0">
               <a:solidFill>
@@ -12169,10 +12169,10 @@
       </p:sp>
       <p:pic>
         <p:nvPicPr>
-          <p:cNvPr id="7" name="圖片 6">
+          <p:cNvPr id="9" name="圖片 8">
             <a:extLst>
               <a:ext uri="{FF2B5EF4-FFF2-40B4-BE49-F238E27FC236}">
-                <a16:creationId xmlns:a16="http://schemas.microsoft.com/office/drawing/2014/main" id="{4685E5F9-E58A-4892-C4E4-77C3783F73D4}"/>
+                <a16:creationId xmlns:a16="http://schemas.microsoft.com/office/drawing/2014/main" id="{11FF21A4-0495-217E-4524-886B953B2866}"/>
               </a:ext>
             </a:extLst>
           </p:cNvPr>
@@ -12189,8 +12189,8 @@
         </p:blipFill>
         <p:spPr>
           <a:xfrm>
-            <a:off x="0" y="5018921"/>
-            <a:ext cx="6858000" cy="6184292"/>
+            <a:off x="62333" y="4562289"/>
+            <a:ext cx="6733333" cy="5438095"/>
           </a:xfrm>
           <a:prstGeom prst="rect">
             <a:avLst/>
@@ -17136,8 +17136,8 @@
         </p:nvSpPr>
         <p:spPr>
           <a:xfrm>
-            <a:off x="237490" y="885138"/>
-            <a:ext cx="4228184" cy="509524"/>
+            <a:off x="237489" y="885138"/>
+            <a:ext cx="6332643" cy="509524"/>
           </a:xfrm>
         </p:spPr>
         <p:txBody>
@@ -17147,11 +17147,11 @@
           <a:lstStyle/>
           <a:p>
             <a:r>
-              <a:rPr lang="zh-TW" altLang="en-US" dirty="0">
+              <a:rPr lang="zh-TW" altLang="en-US">
                 <a:latin typeface="Noto Serif TC Black" panose="02020200000000000000" pitchFamily="18" charset="-128"/>
                 <a:ea typeface="Noto Serif TC Black" panose="02020200000000000000" pitchFamily="18" charset="-128"/>
               </a:rPr>
-              <a:t>台羅拼音之四聲八調</a:t>
+              <a:t>四聲八調助記法</a:t>
             </a:r>
             <a:endParaRPr lang="zh-TW" altLang="en-US" dirty="0">
               <a:solidFill>
@@ -17163,10 +17163,10 @@
       </p:sp>
       <p:pic>
         <p:nvPicPr>
-          <p:cNvPr id="10" name="圖片 9">
+          <p:cNvPr id="13" name="圖片 12">
             <a:extLst>
               <a:ext uri="{FF2B5EF4-FFF2-40B4-BE49-F238E27FC236}">
-                <a16:creationId xmlns:a16="http://schemas.microsoft.com/office/drawing/2014/main" id="{69EC94B1-217F-1A5A-D2BE-183CB1C13198}"/>
+                <a16:creationId xmlns:a16="http://schemas.microsoft.com/office/drawing/2014/main" id="{43C9A66B-6EF0-EDB4-B5EB-1A04257029DB}"/>
               </a:ext>
             </a:extLst>
           </p:cNvPr>
@@ -17183,8 +17183,8 @@
         </p:blipFill>
         <p:spPr>
           <a:xfrm>
-            <a:off x="237490" y="2032152"/>
-            <a:ext cx="6383020" cy="4233030"/>
+            <a:off x="0" y="6902672"/>
+            <a:ext cx="6858000" cy="3852672"/>
           </a:xfrm>
           <a:prstGeom prst="rect">
             <a:avLst/>
@@ -17193,10 +17193,10 @@
       </p:pic>
       <p:pic>
         <p:nvPicPr>
-          <p:cNvPr id="13" name="圖片 12">
+          <p:cNvPr id="19" name="圖片 18">
             <a:extLst>
               <a:ext uri="{FF2B5EF4-FFF2-40B4-BE49-F238E27FC236}">
-                <a16:creationId xmlns:a16="http://schemas.microsoft.com/office/drawing/2014/main" id="{43C9A66B-6EF0-EDB4-B5EB-1A04257029DB}"/>
+                <a16:creationId xmlns:a16="http://schemas.microsoft.com/office/drawing/2014/main" id="{653DAD47-EF9A-1E68-FA68-D8526EA4A17C}"/>
               </a:ext>
             </a:extLst>
           </p:cNvPr>
@@ -17213,8 +17213,8 @@
         </p:blipFill>
         <p:spPr>
           <a:xfrm>
-            <a:off x="0" y="6902672"/>
-            <a:ext cx="6858000" cy="3852672"/>
+            <a:off x="237488" y="2256996"/>
+            <a:ext cx="6332644" cy="3937512"/>
           </a:xfrm>
           <a:prstGeom prst="rect">
             <a:avLst/>
@@ -19312,6 +19312,158 @@
         <p:cNvPr id="1" name="">
           <a:extLst>
             <a:ext uri="{FF2B5EF4-FFF2-40B4-BE49-F238E27FC236}">
+              <a16:creationId xmlns:a16="http://schemas.microsoft.com/office/drawing/2014/main" id="{05630A96-C752-CA87-A66E-A2C14D346C8F}"/>
+            </a:ext>
+          </a:extLst>
+        </p:cNvPr>
+        <p:cNvGrpSpPr/>
+        <p:nvPr/>
+      </p:nvGrpSpPr>
+      <p:grpSpPr>
+        <a:xfrm>
+          <a:off x="0" y="0"/>
+          <a:ext cx="0" cy="0"/>
+          <a:chOff x="0" y="0"/>
+          <a:chExt cx="0" cy="0"/>
+        </a:xfrm>
+      </p:grpSpPr>
+      <p:sp>
+        <p:nvSpPr>
+          <p:cNvPr id="5" name="標題 4">
+            <a:extLst>
+              <a:ext uri="{FF2B5EF4-FFF2-40B4-BE49-F238E27FC236}">
+                <a16:creationId xmlns:a16="http://schemas.microsoft.com/office/drawing/2014/main" id="{6188087C-6002-B6F9-8CCB-25C44663FBC6}"/>
+              </a:ext>
+            </a:extLst>
+          </p:cNvPr>
+          <p:cNvSpPr>
+            <a:spLocks noGrp="1"/>
+          </p:cNvSpPr>
+          <p:nvPr>
+            <p:ph type="title"/>
+          </p:nvPr>
+        </p:nvSpPr>
+        <p:spPr>
+          <a:xfrm>
+            <a:off x="471487" y="0"/>
+            <a:ext cx="5915025" cy="1297332"/>
+          </a:xfrm>
+        </p:spPr>
+        <p:txBody>
+          <a:bodyPr/>
+          <a:lstStyle/>
+          <a:p>
+            <a:r>
+              <a:rPr lang="zh-TW" altLang="en-US" dirty="0">
+                <a:solidFill>
+                  <a:srgbClr val="002060"/>
+                </a:solidFill>
+                <a:latin typeface="Noto Serif TC Black" panose="02020200000000000000" pitchFamily="18" charset="-128"/>
+                <a:ea typeface="Noto Serif TC Black" panose="02020200000000000000" pitchFamily="18" charset="-128"/>
+              </a:rPr>
+              <a:t>八調之</a:t>
+            </a:r>
+            <a:r>
+              <a:rPr lang="zh-TW" altLang="en-US">
+                <a:solidFill>
+                  <a:srgbClr val="002060"/>
+                </a:solidFill>
+                <a:latin typeface="Noto Serif TC Black" panose="02020200000000000000" pitchFamily="18" charset="-128"/>
+                <a:ea typeface="Noto Serif TC Black" panose="02020200000000000000" pitchFamily="18" charset="-128"/>
+              </a:rPr>
+              <a:t>變調規則（一）</a:t>
+            </a:r>
+            <a:endParaRPr lang="zh-TW" altLang="en-US" dirty="0">
+              <a:solidFill>
+                <a:srgbClr val="002060"/>
+              </a:solidFill>
+              <a:latin typeface="Noto Serif TC Black" panose="02020200000000000000" pitchFamily="18" charset="-128"/>
+              <a:ea typeface="Noto Serif TC Black" panose="02020200000000000000" pitchFamily="18" charset="-128"/>
+            </a:endParaRPr>
+          </a:p>
+        </p:txBody>
+      </p:sp>
+      <p:pic>
+        <p:nvPicPr>
+          <p:cNvPr id="7" name="圖片 6">
+            <a:extLst>
+              <a:ext uri="{FF2B5EF4-FFF2-40B4-BE49-F238E27FC236}">
+                <a16:creationId xmlns:a16="http://schemas.microsoft.com/office/drawing/2014/main" id="{09A5C392-8546-63D2-05D7-D5F9A50B5920}"/>
+              </a:ext>
+            </a:extLst>
+          </p:cNvPr>
+          <p:cNvPicPr>
+            <a:picLocks noChangeAspect="1"/>
+          </p:cNvPicPr>
+          <p:nvPr/>
+        </p:nvPicPr>
+        <p:blipFill>
+          <a:blip r:embed="rId2"/>
+          <a:stretch>
+            <a:fillRect/>
+          </a:stretch>
+        </p:blipFill>
+        <p:spPr>
+          <a:xfrm>
+            <a:off x="-1" y="1602134"/>
+            <a:ext cx="6858000" cy="6400190"/>
+          </a:xfrm>
+          <a:prstGeom prst="rect">
+            <a:avLst/>
+          </a:prstGeom>
+        </p:spPr>
+      </p:pic>
+      <p:pic>
+        <p:nvPicPr>
+          <p:cNvPr id="3" name="圖片 2">
+            <a:extLst>
+              <a:ext uri="{FF2B5EF4-FFF2-40B4-BE49-F238E27FC236}">
+                <a16:creationId xmlns:a16="http://schemas.microsoft.com/office/drawing/2014/main" id="{7C84B49A-8D1C-F64C-788B-691C292E5A07}"/>
+              </a:ext>
+            </a:extLst>
+          </p:cNvPr>
+          <p:cNvPicPr>
+            <a:picLocks noChangeAspect="1"/>
+          </p:cNvPicPr>
+          <p:nvPr/>
+        </p:nvPicPr>
+        <p:blipFill>
+          <a:blip r:embed="rId3"/>
+          <a:stretch>
+            <a:fillRect/>
+          </a:stretch>
+        </p:blipFill>
+        <p:spPr>
+          <a:xfrm>
+            <a:off x="0" y="7952538"/>
+            <a:ext cx="6858000" cy="3852672"/>
+          </a:xfrm>
+          <a:prstGeom prst="rect">
+            <a:avLst/>
+          </a:prstGeom>
+        </p:spPr>
+      </p:pic>
+    </p:spTree>
+    <p:extLst>
+      <p:ext uri="{BB962C8B-B14F-4D97-AF65-F5344CB8AC3E}">
+        <p14:creationId xmlns:p14="http://schemas.microsoft.com/office/powerpoint/2010/main" val="3199250060"/>
+      </p:ext>
+    </p:extLst>
+  </p:cSld>
+  <p:clrMapOvr>
+    <a:masterClrMapping/>
+  </p:clrMapOvr>
+</p:sld>
+</file>
+
+<file path=ppt/slides/slide9.xml><?xml version="1.0" encoding="utf-8"?>
+<p:sld xmlns:a="http://schemas.openxmlformats.org/drawingml/2006/main" xmlns:r="http://schemas.openxmlformats.org/officeDocument/2006/relationships" xmlns:p="http://schemas.openxmlformats.org/presentationml/2006/main">
+  <p:cSld>
+    <p:spTree>
+      <p:nvGrpSpPr>
+        <p:cNvPr id="1" name="">
+          <a:extLst>
+            <a:ext uri="{FF2B5EF4-FFF2-40B4-BE49-F238E27FC236}">
               <a16:creationId xmlns:a16="http://schemas.microsoft.com/office/drawing/2014/main" id="{6EC6D980-8912-78D2-C70A-812B160F5F00}"/>
             </a:ext>
           </a:extLst>
@@ -19371,7 +19523,7 @@
                 <a:latin typeface="Noto Serif TC Black" panose="02020200000000000000" pitchFamily="18" charset="-128"/>
                 <a:ea typeface="Noto Serif TC Black" panose="02020200000000000000" pitchFamily="18" charset="-128"/>
               </a:rPr>
-              <a:t>變調規則（一）</a:t>
+              <a:t>變調規則（二）</a:t>
             </a:r>
             <a:endParaRPr lang="zh-TW" altLang="en-US" dirty="0">
               <a:solidFill>
@@ -20033,104 +20185,12 @@
           </a:p>
         </p:txBody>
       </p:sp>
-    </p:spTree>
-    <p:extLst>
-      <p:ext uri="{BB962C8B-B14F-4D97-AF65-F5344CB8AC3E}">
-        <p14:creationId xmlns:p14="http://schemas.microsoft.com/office/powerpoint/2010/main" val="2069651646"/>
-      </p:ext>
-    </p:extLst>
-  </p:cSld>
-  <p:clrMapOvr>
-    <a:masterClrMapping/>
-  </p:clrMapOvr>
-</p:sld>
-</file>
-
-<file path=ppt/slides/slide9.xml><?xml version="1.0" encoding="utf-8"?>
-<p:sld xmlns:a="http://schemas.openxmlformats.org/drawingml/2006/main" xmlns:r="http://schemas.openxmlformats.org/officeDocument/2006/relationships" xmlns:p="http://schemas.openxmlformats.org/presentationml/2006/main">
-  <p:cSld>
-    <p:spTree>
-      <p:nvGrpSpPr>
-        <p:cNvPr id="1" name="">
-          <a:extLst>
-            <a:ext uri="{FF2B5EF4-FFF2-40B4-BE49-F238E27FC236}">
-              <a16:creationId xmlns:a16="http://schemas.microsoft.com/office/drawing/2014/main" id="{7C1271C6-B819-135F-C252-44EA68E000DD}"/>
-            </a:ext>
-          </a:extLst>
-        </p:cNvPr>
-        <p:cNvGrpSpPr/>
-        <p:nvPr/>
-      </p:nvGrpSpPr>
-      <p:grpSpPr>
-        <a:xfrm>
-          <a:off x="0" y="0"/>
-          <a:ext cx="0" cy="0"/>
-          <a:chOff x="0" y="0"/>
-          <a:chExt cx="0" cy="0"/>
-        </a:xfrm>
-      </p:grpSpPr>
-      <p:sp>
-        <p:nvSpPr>
-          <p:cNvPr id="5" name="標題 4">
+      <p:pic>
+        <p:nvPicPr>
+          <p:cNvPr id="3" name="圖片 2">
             <a:extLst>
               <a:ext uri="{FF2B5EF4-FFF2-40B4-BE49-F238E27FC236}">
-                <a16:creationId xmlns:a16="http://schemas.microsoft.com/office/drawing/2014/main" id="{5D027EAD-9C4C-86E8-4139-9A75BAD8B662}"/>
-              </a:ext>
-            </a:extLst>
-          </p:cNvPr>
-          <p:cNvSpPr>
-            <a:spLocks noGrp="1"/>
-          </p:cNvSpPr>
-          <p:nvPr>
-            <p:ph type="title"/>
-          </p:nvPr>
-        </p:nvSpPr>
-        <p:spPr>
-          <a:xfrm>
-            <a:off x="471487" y="0"/>
-            <a:ext cx="5915025" cy="1297332"/>
-          </a:xfrm>
-        </p:spPr>
-        <p:txBody>
-          <a:bodyPr/>
-          <a:lstStyle/>
-          <a:p>
-            <a:r>
-              <a:rPr lang="zh-TW" altLang="en-US" dirty="0">
-                <a:solidFill>
-                  <a:srgbClr val="002060"/>
-                </a:solidFill>
-                <a:latin typeface="Noto Serif TC Black" panose="02020200000000000000" pitchFamily="18" charset="-128"/>
-                <a:ea typeface="Noto Serif TC Black" panose="02020200000000000000" pitchFamily="18" charset="-128"/>
-              </a:rPr>
-              <a:t>八調之</a:t>
-            </a:r>
-            <a:r>
-              <a:rPr lang="zh-TW" altLang="en-US">
-                <a:solidFill>
-                  <a:srgbClr val="002060"/>
-                </a:solidFill>
-                <a:latin typeface="Noto Serif TC Black" panose="02020200000000000000" pitchFamily="18" charset="-128"/>
-                <a:ea typeface="Noto Serif TC Black" panose="02020200000000000000" pitchFamily="18" charset="-128"/>
-              </a:rPr>
-              <a:t>變調規則（二）</a:t>
-            </a:r>
-            <a:endParaRPr lang="zh-TW" altLang="en-US" dirty="0">
-              <a:solidFill>
-                <a:srgbClr val="002060"/>
-              </a:solidFill>
-              <a:latin typeface="Noto Serif TC Black" panose="02020200000000000000" pitchFamily="18" charset="-128"/>
-              <a:ea typeface="Noto Serif TC Black" panose="02020200000000000000" pitchFamily="18" charset="-128"/>
-            </a:endParaRPr>
-          </a:p>
-        </p:txBody>
-      </p:sp>
-      <p:pic>
-        <p:nvPicPr>
-          <p:cNvPr id="7" name="圖片 6">
-            <a:extLst>
-              <a:ext uri="{FF2B5EF4-FFF2-40B4-BE49-F238E27FC236}">
-                <a16:creationId xmlns:a16="http://schemas.microsoft.com/office/drawing/2014/main" id="{1396F4B7-9B33-6476-781D-0E6892BBA2E8}"/>
+                <a16:creationId xmlns:a16="http://schemas.microsoft.com/office/drawing/2014/main" id="{2AC9F826-4E19-C1E5-493F-25B8D288F763}"/>
               </a:ext>
             </a:extLst>
           </p:cNvPr>
@@ -20147,37 +20207,7 @@
         </p:blipFill>
         <p:spPr>
           <a:xfrm>
-            <a:off x="-1" y="1602134"/>
-            <a:ext cx="6858000" cy="6400190"/>
-          </a:xfrm>
-          <a:prstGeom prst="rect">
-            <a:avLst/>
-          </a:prstGeom>
-        </p:spPr>
-      </p:pic>
-      <p:pic>
-        <p:nvPicPr>
-          <p:cNvPr id="9" name="圖片 8">
-            <a:extLst>
-              <a:ext uri="{FF2B5EF4-FFF2-40B4-BE49-F238E27FC236}">
-                <a16:creationId xmlns:a16="http://schemas.microsoft.com/office/drawing/2014/main" id="{52520370-2936-0D2F-1F8D-4B21F462D23A}"/>
-              </a:ext>
-            </a:extLst>
-          </p:cNvPr>
-          <p:cNvPicPr>
-            <a:picLocks noChangeAspect="1"/>
-          </p:cNvPicPr>
-          <p:nvPr/>
-        </p:nvPicPr>
-        <p:blipFill>
-          <a:blip r:embed="rId3"/>
-          <a:stretch>
-            <a:fillRect/>
-          </a:stretch>
-        </p:blipFill>
-        <p:spPr>
-          <a:xfrm>
-            <a:off x="1356178" y="8498593"/>
+            <a:off x="1356178" y="8871122"/>
             <a:ext cx="4493079" cy="3167873"/>
           </a:xfrm>
           <a:prstGeom prst="rect">
@@ -20188,7 +20218,7 @@
     </p:spTree>
     <p:extLst>
       <p:ext uri="{BB962C8B-B14F-4D97-AF65-F5344CB8AC3E}">
-        <p14:creationId xmlns:p14="http://schemas.microsoft.com/office/powerpoint/2010/main" val="1974442737"/>
+        <p14:creationId xmlns:p14="http://schemas.microsoft.com/office/powerpoint/2010/main" val="2069651646"/>
       </p:ext>
     </p:extLst>
   </p:cSld>
